--- a/포트폴리오/수지_부동산수지분석_포트폴리오.pptx
+++ b/포트폴리오/수지_부동산수지분석_포트폴리오.pptx
@@ -3092,7 +3092,7 @@
     <p:bg>
       <p:bgPr>
         <a:solidFill>
-          <a:srgbClr val="F4F6F8"/>
+          <a:srgbClr val="FAF7F2"/>
         </a:solidFill>
         <a:effectLst/>
       </p:bgPr>
@@ -3120,8 +3120,8 @@
         </p:blipFill>
         <p:spPr>
           <a:xfrm>
-            <a:off x="609447" y="0"/>
-            <a:ext cx="10972800" cy="6858000"/>
+            <a:off x="1158087" y="0"/>
+            <a:ext cx="9875520" cy="6858000"/>
           </a:xfrm>
           <a:prstGeom prst="rect">
             <a:avLst/>
@@ -3143,7 +3143,7 @@
             <a:avLst/>
           </a:prstGeom>
           <a:solidFill>
-            <a:srgbClr val="16202B"/>
+            <a:srgbClr val="2B2016"/>
           </a:solidFill>
           <a:ln>
             <a:noFill/>
@@ -3195,13 +3195,13 @@
           <a:p>
             <a:pPr algn="l"/>
             <a:r>
-              <a:rPr sz="1500" b="1">
-                <a:solidFill>
-                  <a:srgbClr val="F4F6F8"/>
-                </a:solidFill>
-                <a:latin typeface="Apple SD Gothic Neo"/>
-              </a:rPr>
-              <a:t>수지(收支) — 대한민국 부동산 개발의 손익 구조  ·  개인 연구 포트폴리오  ·  서윤재</a:t>
+              <a:rPr sz="1450" b="1">
+                <a:solidFill>
+                  <a:srgbClr val="FAF7F2"/>
+                </a:solidFill>
+                <a:latin typeface="Apple SD Gothic Neo"/>
+              </a:rPr>
+              <a:t>수지(收支) — 대한민국 부동산 개발의 손익 구조  ·  개인 연구 포트폴리오  ·  서윤재  ·  yoonjae.pages.dev</a:t>
             </a:r>
           </a:p>
         </p:txBody>
@@ -3220,7 +3220,7 @@
     <p:bg>
       <p:bgPr>
         <a:solidFill>
-          <a:srgbClr val="F4F6F8"/>
+          <a:srgbClr val="FAF7F2"/>
         </a:solidFill>
         <a:effectLst/>
       </p:bgPr>
@@ -3258,7 +3258,7 @@
             <a:r>
               <a:rPr sz="3000" b="1">
                 <a:solidFill>
-                  <a:srgbClr val="1E5D95"/>
+                  <a:srgbClr val="C2410C"/>
                 </a:solidFill>
                 <a:latin typeface="Apple SD Gothic Neo"/>
               </a:rPr>
@@ -3293,7 +3293,7 @@
             <a:r>
               <a:rPr sz="2600" b="1">
                 <a:solidFill>
-                  <a:srgbClr val="16202B"/>
+                  <a:srgbClr val="2B2016"/>
                 </a:solidFill>
                 <a:latin typeface="Apple SD Gothic Neo"/>
               </a:rPr>
@@ -3328,11 +3328,11 @@
             <a:r>
               <a:rPr sz="1300" b="0">
                 <a:solidFill>
-                  <a:srgbClr val="4C5A68"/>
-                </a:solidFill>
-                <a:latin typeface="Apple SD Gothic Neo"/>
-              </a:rPr>
-              <a:t>공공 데이터 → 재무 모델 → 인터랙티브 웹 리포트, 전 과정을 하루 사이클로 구축</a:t>
+                  <a:srgbClr val="6B5A49"/>
+                </a:solidFill>
+                <a:latin typeface="Apple SD Gothic Neo"/>
+              </a:rPr>
+              <a:t>공공 데이터 → 재무 모델 → 인터랙티브 웹 리포트 — 매월 자동 갱신되는 연구 플랫폼</a:t>
             </a:r>
           </a:p>
         </p:txBody>
@@ -3352,7 +3352,7 @@
             <a:avLst/>
           </a:prstGeom>
           <a:solidFill>
-            <a:srgbClr val="1E5D95"/>
+            <a:srgbClr val="C2410C"/>
           </a:solidFill>
           <a:ln>
             <a:noFill/>
@@ -3406,7 +3406,7 @@
             <a:r>
               <a:rPr sz="1700" b="1">
                 <a:solidFill>
-                  <a:srgbClr val="1E5D95"/>
+                  <a:srgbClr val="C2410C"/>
                 </a:solidFill>
                 <a:latin typeface="Apple SD Gothic Neo"/>
               </a:rPr>
@@ -3418,7 +3418,7 @@
             <a:r>
               <a:rPr sz="1400" b="0">
                 <a:solidFill>
-                  <a:srgbClr val="16202B"/>
+                  <a:srgbClr val="2B2016"/>
                 </a:solidFill>
                 <a:latin typeface="Apple SD Gothic Neo"/>
               </a:rPr>
@@ -3430,7 +3430,7 @@
             <a:r>
               <a:rPr sz="1400" b="0">
                 <a:solidFill>
-                  <a:srgbClr val="16202B"/>
+                  <a:srgbClr val="2B2016"/>
                 </a:solidFill>
                 <a:latin typeface="Apple SD Gothic Neo"/>
               </a:rPr>
@@ -3442,7 +3442,7 @@
             <a:r>
               <a:rPr sz="800" b="0">
                 <a:solidFill>
-                  <a:srgbClr val="16202B"/>
+                  <a:srgbClr val="2B2016"/>
                 </a:solidFill>
                 <a:latin typeface="Apple SD Gothic Neo"/>
               </a:rPr>
@@ -3454,7 +3454,7 @@
             <a:r>
               <a:rPr sz="1700" b="1">
                 <a:solidFill>
-                  <a:srgbClr val="1E5D95"/>
+                  <a:srgbClr val="C2410C"/>
                 </a:solidFill>
                 <a:latin typeface="Apple SD Gothic Neo"/>
               </a:rPr>
@@ -3466,11 +3466,11 @@
             <a:r>
               <a:rPr sz="1400" b="0">
                 <a:solidFill>
-                  <a:srgbClr val="16202B"/>
-                </a:solidFill>
-                <a:latin typeface="Apple SD Gothic Neo"/>
-              </a:rPr>
-              <a:t>시행사 · 자산운용사 · 컨설팅 — IC(투자심의)/딜 스크리닝에</a:t>
+                  <a:srgbClr val="2B2016"/>
+                </a:solidFill>
+                <a:latin typeface="Apple SD Gothic Neo"/>
+              </a:rPr>
+              <a:t>시행사 · 자산운용사 · 컨설팅 — 딜 스크리닝의 초기 검토 흐름을</a:t>
             </a:r>
           </a:p>
           <a:p>
@@ -3478,11 +3478,11 @@
             <a:r>
               <a:rPr sz="1400" b="0">
                 <a:solidFill>
-                  <a:srgbClr val="16202B"/>
-                </a:solidFill>
-                <a:latin typeface="Apple SD Gothic Neo"/>
-              </a:rPr>
-              <a:t>바로 쓸 수 있는 정밀도와 기관 보고서 격의 완성도를 지향.</a:t>
+                  <a:srgbClr val="2B2016"/>
+                </a:solidFill>
+                <a:latin typeface="Apple SD Gothic Neo"/>
+              </a:rPr>
+              <a:t>재현하는 정밀도와 기관 보고서 격의 완성도를 지향.</a:t>
             </a:r>
           </a:p>
           <a:p>
@@ -3490,7 +3490,7 @@
             <a:r>
               <a:rPr sz="800" b="0">
                 <a:solidFill>
-                  <a:srgbClr val="16202B"/>
+                  <a:srgbClr val="2B2016"/>
                 </a:solidFill>
                 <a:latin typeface="Apple SD Gothic Neo"/>
               </a:rPr>
@@ -3502,7 +3502,7 @@
             <a:r>
               <a:rPr sz="1700" b="1">
                 <a:solidFill>
-                  <a:srgbClr val="1E5D95"/>
+                  <a:srgbClr val="C2410C"/>
                 </a:solidFill>
                 <a:latin typeface="Apple SD Gothic Neo"/>
               </a:rPr>
@@ -3514,7 +3514,7 @@
             <a:r>
               <a:rPr sz="1400" b="0">
                 <a:solidFill>
-                  <a:srgbClr val="16202B"/>
+                  <a:srgbClr val="2B2016"/>
                 </a:solidFill>
                 <a:latin typeface="Apple SD Gothic Neo"/>
               </a:rPr>
@@ -3526,11 +3526,11 @@
             <a:r>
               <a:rPr sz="1400" b="0">
                 <a:solidFill>
-                  <a:srgbClr val="16202B"/>
-                </a:solidFill>
-                <a:latin typeface="Apple SD Gothic Neo"/>
-              </a:rPr>
-              <a:t>② 정비사업 비례율·분담금까지 계산하는 4모드 실시간 계산기</a:t>
+                  <a:srgbClr val="2B2016"/>
+                </a:solidFill>
+                <a:latin typeface="Apple SD Gothic Neo"/>
+              </a:rPr>
+              <a:t>② 정비 비례율·분담금, 수익형 NOI·환원율까지 실시간 계산기</a:t>
             </a:r>
           </a:p>
           <a:p>
@@ -3538,7 +3538,7 @@
             <a:r>
               <a:rPr sz="1400" b="0">
                 <a:solidFill>
-                  <a:srgbClr val="16202B"/>
+                  <a:srgbClr val="2B2016"/>
                 </a:solidFill>
                 <a:latin typeface="Apple SD Gothic Neo"/>
               </a:rPr>
@@ -3556,7 +3556,7 @@
         <p:spPr>
           <a:xfrm>
             <a:off x="6400800" y="1737360"/>
-            <a:ext cx="5120640" cy="4206240"/>
+            <a:ext cx="5120640" cy="4389120"/>
           </a:xfrm>
           <a:prstGeom prst="rect">
             <a:avLst/>
@@ -3573,7 +3573,7 @@
             <a:r>
               <a:rPr sz="1700" b="1">
                 <a:solidFill>
-                  <a:srgbClr val="1E5D95"/>
+                  <a:srgbClr val="C2410C"/>
                 </a:solidFill>
                 <a:latin typeface="Apple SD Gothic Neo"/>
               </a:rPr>
@@ -3583,9 +3583,9 @@
           <a:p>
             <a:pPr algn="l"/>
             <a:r>
-              <a:rPr sz="600" b="0">
-                <a:solidFill>
-                  <a:srgbClr val="16202B"/>
+              <a:rPr sz="500" b="0">
+                <a:solidFill>
+                  <a:srgbClr val="2B2016"/>
                 </a:solidFill>
                 <a:latin typeface="Apple SD Gothic Neo"/>
               </a:rPr>
@@ -3595,69 +3595,93 @@
           <a:p>
             <a:pPr algn="l"/>
             <a:r>
-              <a:rPr sz="1600" b="1">
-                <a:solidFill>
-                  <a:srgbClr val="16202B"/>
-                </a:solidFill>
-                <a:latin typeface="Apple SD Gothic Neo"/>
-              </a:rPr>
-              <a:t>216,804건    아파트 실거래 수집</a:t>
-            </a:r>
-          </a:p>
-          <a:p>
-            <a:pPr algn="l"/>
-            <a:r>
-              <a:rPr sz="1600" b="1">
-                <a:solidFill>
-                  <a:srgbClr val="16202B"/>
-                </a:solidFill>
-                <a:latin typeface="Apple SD Gothic Neo"/>
-              </a:rPr>
-              <a:t>43계열       시장 시계열 (월별 10년)</a:t>
-            </a:r>
-          </a:p>
-          <a:p>
-            <a:pPr algn="l"/>
-            <a:r>
-              <a:rPr sz="1600" b="1">
-                <a:solidFill>
-                  <a:srgbClr val="16202B"/>
-                </a:solidFill>
-                <a:latin typeface="Apple SD Gothic Neo"/>
-              </a:rPr>
-              <a:t>8종          공공 API 연동</a:t>
-            </a:r>
-          </a:p>
-          <a:p>
-            <a:pPr algn="l"/>
-            <a:r>
-              <a:rPr sz="1600" b="1">
-                <a:solidFill>
-                  <a:srgbClr val="16202B"/>
-                </a:solidFill>
-                <a:latin typeface="Apple SD Gothic Neo"/>
-              </a:rPr>
-              <a:t>6모델        예측 벤치마크</a:t>
-            </a:r>
-          </a:p>
-          <a:p>
-            <a:pPr algn="l"/>
-            <a:r>
-              <a:rPr sz="1600" b="1">
-                <a:solidFill>
-                  <a:srgbClr val="16202B"/>
-                </a:solidFill>
-                <a:latin typeface="Apple SD Gothic Neo"/>
-              </a:rPr>
-              <a:t>148개        자동화 검증 테스트</a:t>
-            </a:r>
-          </a:p>
-          <a:p>
-            <a:pPr algn="l"/>
-            <a:r>
-              <a:rPr sz="600" b="0">
-                <a:solidFill>
-                  <a:srgbClr val="16202B"/>
+              <a:rPr sz="1550" b="1">
+                <a:solidFill>
+                  <a:srgbClr val="2B2016"/>
+                </a:solidFill>
+                <a:latin typeface="Apple SD Gothic Neo"/>
+              </a:rPr>
+              <a:t>236,388건   아파트 실거래 (매매+분양권)</a:t>
+            </a:r>
+          </a:p>
+          <a:p>
+            <a:pPr algn="l"/>
+            <a:r>
+              <a:rPr sz="1550" b="1">
+                <a:solidFill>
+                  <a:srgbClr val="2B2016"/>
+                </a:solidFill>
+                <a:latin typeface="Apple SD Gothic Neo"/>
+              </a:rPr>
+              <a:t>195,863건   서울 25개 구 아파트 전수</a:t>
+            </a:r>
+          </a:p>
+          <a:p>
+            <a:pPr algn="l"/>
+            <a:r>
+              <a:rPr sz="1550" b="1">
+                <a:solidFill>
+                  <a:srgbClr val="2B2016"/>
+                </a:solidFill>
+                <a:latin typeface="Apple SD Gothic Neo"/>
+              </a:rPr>
+              <a:t>153,285건   상업·업무·오피스텔·토지 실거래</a:t>
+            </a:r>
+          </a:p>
+          <a:p>
+            <a:pPr algn="l"/>
+            <a:r>
+              <a:rPr sz="1550" b="1">
+                <a:solidFill>
+                  <a:srgbClr val="2B2016"/>
+                </a:solidFill>
+                <a:latin typeface="Apple SD Gothic Neo"/>
+              </a:rPr>
+              <a:t>77계열      시장 시계열 (월별 10년)</a:t>
+            </a:r>
+          </a:p>
+          <a:p>
+            <a:pPr algn="l"/>
+            <a:r>
+              <a:rPr sz="1550" b="1">
+                <a:solidFill>
+                  <a:srgbClr val="2B2016"/>
+                </a:solidFill>
+                <a:latin typeface="Apple SD Gothic Neo"/>
+              </a:rPr>
+              <a:t>14종        공공 데이터셋 (7개 기관 API)</a:t>
+            </a:r>
+          </a:p>
+          <a:p>
+            <a:pPr algn="l"/>
+            <a:r>
+              <a:rPr sz="1550" b="1">
+                <a:solidFill>
+                  <a:srgbClr val="2B2016"/>
+                </a:solidFill>
+                <a:latin typeface="Apple SD Gothic Neo"/>
+              </a:rPr>
+              <a:t>6모델       예측 벤치마크</a:t>
+            </a:r>
+          </a:p>
+          <a:p>
+            <a:pPr algn="l"/>
+            <a:r>
+              <a:rPr sz="1550" b="1">
+                <a:solidFill>
+                  <a:srgbClr val="2B2016"/>
+                </a:solidFill>
+                <a:latin typeface="Apple SD Gothic Neo"/>
+              </a:rPr>
+              <a:t>162개       자동화 검증 테스트</a:t>
+            </a:r>
+          </a:p>
+          <a:p>
+            <a:pPr algn="l"/>
+            <a:r>
+              <a:rPr sz="500" b="0">
+                <a:solidFill>
+                  <a:srgbClr val="2B2016"/>
                 </a:solidFill>
                 <a:latin typeface="Apple SD Gothic Neo"/>
               </a:rPr>
@@ -3669,11 +3693,11 @@
             <a:r>
               <a:rPr sz="1300" b="0">
                 <a:solidFill>
-                  <a:srgbClr val="4C5A68"/>
-                </a:solidFill>
-                <a:latin typeface="Apple SD Gothic Neo"/>
-              </a:rPr>
-              <a:t>데이터: 한국부동산원 R-ONE · 국토부 RTMS · KOSIS ·</a:t>
+                  <a:srgbClr val="6B5A49"/>
+                </a:solidFill>
+                <a:latin typeface="Apple SD Gothic Neo"/>
+              </a:rPr>
+              <a:t>한국부동산원 R-ONE · 국토부 RTMS·건축HUB · KOSIS ·</a:t>
             </a:r>
           </a:p>
           <a:p>
@@ -3681,7 +3705,7 @@
             <a:r>
               <a:rPr sz="1300" b="0">
                 <a:solidFill>
-                  <a:srgbClr val="4C5A68"/>
+                  <a:srgbClr val="6B5A49"/>
                 </a:solidFill>
                 <a:latin typeface="Apple SD Gothic Neo"/>
               </a:rPr>
@@ -3704,7 +3728,7 @@
     <p:bg>
       <p:bgPr>
         <a:solidFill>
-          <a:srgbClr val="F4F6F8"/>
+          <a:srgbClr val="FAF7F2"/>
         </a:solidFill>
         <a:effectLst/>
       </p:bgPr>
@@ -3742,7 +3766,7 @@
             <a:r>
               <a:rPr sz="3000" b="1">
                 <a:solidFill>
-                  <a:srgbClr val="1E5D95"/>
+                  <a:srgbClr val="C2410C"/>
                 </a:solidFill>
                 <a:latin typeface="Apple SD Gothic Neo"/>
               </a:rPr>
@@ -3777,7 +3801,7 @@
             <a:r>
               <a:rPr sz="2600" b="1">
                 <a:solidFill>
-                  <a:srgbClr val="16202B"/>
+                  <a:srgbClr val="2B2016"/>
                 </a:solidFill>
                 <a:latin typeface="Apple SD Gothic Neo"/>
               </a:rPr>
@@ -3812,11 +3836,11 @@
             <a:r>
               <a:rPr sz="1300" b="0">
                 <a:solidFill>
-                  <a:srgbClr val="4C5A68"/>
-                </a:solidFill>
-                <a:latin typeface="Apple SD Gothic Neo"/>
-              </a:rPr>
-              <a:t>수집(8 API) → 분석·모델 → 베이크 → 웹 — 전 구간 캐시·검증·재현 가능</a:t>
+                  <a:srgbClr val="6B5A49"/>
+                </a:solidFill>
+                <a:latin typeface="Apple SD Gothic Neo"/>
+              </a:rPr>
+              <a:t>수집(14종) → 검증 → 모델 → 예측 → 웹·배포 — launchd 매월 자동 갱신, 실패는 격리·통보</a:t>
             </a:r>
           </a:p>
         </p:txBody>
@@ -3836,7 +3860,7 @@
             <a:avLst/>
           </a:prstGeom>
           <a:solidFill>
-            <a:srgbClr val="1E5D95"/>
+            <a:srgbClr val="C2410C"/>
           </a:solidFill>
           <a:ln>
             <a:noFill/>
@@ -3879,11 +3903,11 @@
             <a:avLst/>
           </a:prstGeom>
           <a:solidFill>
-            <a:srgbClr val="FBFCFD"/>
+            <a:srgbClr val="FFFDFA"/>
           </a:solidFill>
           <a:ln w="15240">
             <a:solidFill>
-              <a:srgbClr val="1E5D95"/>
+              <a:srgbClr val="C2410C"/>
             </a:solidFill>
           </a:ln>
         </p:spPr>
@@ -3909,7 +3933,7 @@
             <a:r>
               <a:rPr sz="1700" b="1">
                 <a:solidFill>
-                  <a:srgbClr val="1E5D95"/>
+                  <a:srgbClr val="C2410C"/>
                 </a:solidFill>
               </a:rPr>
               <a:t>수집</a:t>
@@ -3919,17 +3943,17 @@
             <a:r>
               <a:rPr sz="1200">
                 <a:solidFill>
-                  <a:srgbClr val="4C5A68"/>
-                </a:solidFill>
-              </a:rPr>
-              <a:t>8개 공공 API</a:t>
+                  <a:srgbClr val="6B5A49"/>
+                </a:solidFill>
+              </a:rPr>
+              <a:t>10개 수집기</a:t>
             </a:r>
           </a:p>
           <a:p>
             <a:r>
               <a:rPr sz="1200">
                 <a:solidFill>
-                  <a:srgbClr val="4C5A68"/>
+                  <a:srgbClr val="6B5A49"/>
                 </a:solidFill>
               </a:rPr>
               <a:t>원본 전량 캐시</a:t>
@@ -3939,7 +3963,7 @@
             <a:r>
               <a:rPr sz="1200">
                 <a:solidFill>
-                  <a:srgbClr val="4C5A68"/>
+                  <a:srgbClr val="6B5A49"/>
                 </a:solidFill>
               </a:rPr>
               <a:t>백오프·폴백 명시</a:t>
@@ -3962,7 +3986,7 @@
             <a:avLst/>
           </a:prstGeom>
           <a:solidFill>
-            <a:srgbClr val="1E5D95"/>
+            <a:srgbClr val="C2410C"/>
           </a:solidFill>
           <a:ln>
             <a:noFill/>
@@ -4005,11 +4029,11 @@
             <a:avLst/>
           </a:prstGeom>
           <a:solidFill>
-            <a:srgbClr val="FBFCFD"/>
+            <a:srgbClr val="FFFDFA"/>
           </a:solidFill>
           <a:ln w="15240">
             <a:solidFill>
-              <a:srgbClr val="1E5D95"/>
+              <a:srgbClr val="C2410C"/>
             </a:solidFill>
           </a:ln>
         </p:spPr>
@@ -4035,7 +4059,7 @@
             <a:r>
               <a:rPr sz="1700" b="1">
                 <a:solidFill>
-                  <a:srgbClr val="1E5D95"/>
+                  <a:srgbClr val="C2410C"/>
                 </a:solidFill>
               </a:rPr>
               <a:t>검증</a:t>
@@ -4045,7 +4069,7 @@
             <a:r>
               <a:rPr sz="1200">
                 <a:solidFill>
-                  <a:srgbClr val="4C5A68"/>
+                  <a:srgbClr val="6B5A49"/>
                 </a:solidFill>
               </a:rPr>
               <a:t>단위 통일(원·㎡)</a:t>
@@ -4055,17 +4079,17 @@
             <a:r>
               <a:rPr sz="1200">
                 <a:solidFill>
-                  <a:srgbClr val="4C5A68"/>
-                </a:solidFill>
-              </a:rPr>
-              <a:t>실거래 대조 검증</a:t>
+                  <a:srgbClr val="6B5A49"/>
+                </a:solidFill>
+              </a:rPr>
+              <a:t>물리 범위 게이트</a:t>
             </a:r>
           </a:p>
           <a:p>
             <a:r>
               <a:rPr sz="1200">
                 <a:solidFill>
-                  <a:srgbClr val="4C5A68"/>
+                  <a:srgbClr val="6B5A49"/>
                 </a:solidFill>
               </a:rPr>
               <a:t>결측은 보간 없이 기록</a:t>
@@ -4088,7 +4112,7 @@
             <a:avLst/>
           </a:prstGeom>
           <a:solidFill>
-            <a:srgbClr val="1E5D95"/>
+            <a:srgbClr val="C2410C"/>
           </a:solidFill>
           <a:ln>
             <a:noFill/>
@@ -4131,11 +4155,11 @@
             <a:avLst/>
           </a:prstGeom>
           <a:solidFill>
-            <a:srgbClr val="FBFCFD"/>
+            <a:srgbClr val="FFFDFA"/>
           </a:solidFill>
           <a:ln w="15240">
             <a:solidFill>
-              <a:srgbClr val="1E5D95"/>
+              <a:srgbClr val="C2410C"/>
             </a:solidFill>
           </a:ln>
         </p:spPr>
@@ -4161,7 +4185,7 @@
             <a:r>
               <a:rPr sz="1700" b="1">
                 <a:solidFill>
-                  <a:srgbClr val="1E5D95"/>
+                  <a:srgbClr val="C2410C"/>
                 </a:solidFill>
               </a:rPr>
               <a:t>모델</a:t>
@@ -4171,17 +4195,17 @@
             <a:r>
               <a:rPr sz="1200">
                 <a:solidFill>
-                  <a:srgbClr val="4C5A68"/>
-                </a:solidFill>
-              </a:rPr>
-              <a:t>수지 4모드 코어</a:t>
+                  <a:srgbClr val="6B5A49"/>
+                </a:solidFill>
+              </a:rPr>
+              <a:t>수지 4모드+수익형</a:t>
             </a:r>
           </a:p>
           <a:p>
             <a:r>
               <a:rPr sz="1200">
                 <a:solidFill>
-                  <a:srgbClr val="4C5A68"/>
+                  <a:srgbClr val="6B5A49"/>
                 </a:solidFill>
               </a:rPr>
               <a:t>용도지역 모듈</a:t>
@@ -4191,7 +4215,7 @@
             <a:r>
               <a:rPr sz="1200">
                 <a:solidFill>
-                  <a:srgbClr val="4C5A68"/>
+                  <a:srgbClr val="6B5A49"/>
                 </a:solidFill>
               </a:rPr>
               <a:t>Python↔JS 패리티</a:t>
@@ -4214,7 +4238,7 @@
             <a:avLst/>
           </a:prstGeom>
           <a:solidFill>
-            <a:srgbClr val="1E5D95"/>
+            <a:srgbClr val="C2410C"/>
           </a:solidFill>
           <a:ln>
             <a:noFill/>
@@ -4257,11 +4281,11 @@
             <a:avLst/>
           </a:prstGeom>
           <a:solidFill>
-            <a:srgbClr val="FBFCFD"/>
+            <a:srgbClr val="FFFDFA"/>
           </a:solidFill>
           <a:ln w="15240">
             <a:solidFill>
-              <a:srgbClr val="1E5D95"/>
+              <a:srgbClr val="C2410C"/>
             </a:solidFill>
           </a:ln>
         </p:spPr>
@@ -4287,7 +4311,7 @@
             <a:r>
               <a:rPr sz="1700" b="1">
                 <a:solidFill>
-                  <a:srgbClr val="1E5D95"/>
+                  <a:srgbClr val="C2410C"/>
                 </a:solidFill>
               </a:rPr>
               <a:t>예측</a:t>
@@ -4297,7 +4321,7 @@
             <a:r>
               <a:rPr sz="1200">
                 <a:solidFill>
-                  <a:srgbClr val="4C5A68"/>
+                  <a:srgbClr val="6B5A49"/>
                 </a:solidFill>
               </a:rPr>
               <a:t>SARIMA·LGBM·LSTM</a:t>
@@ -4307,7 +4331,7 @@
             <a:r>
               <a:rPr sz="1200">
                 <a:solidFill>
-                  <a:srgbClr val="4C5A68"/>
+                  <a:srgbClr val="6B5A49"/>
                 </a:solidFill>
               </a:rPr>
               <a:t>Chronos 제로샷</a:t>
@@ -4317,10 +4341,10 @@
             <a:r>
               <a:rPr sz="1200">
                 <a:solidFill>
-                  <a:srgbClr val="4C5A68"/>
-                </a:solidFill>
-              </a:rPr>
-              <a:t>롤링 백테스트</a:t>
+                  <a:srgbClr val="6B5A49"/>
+                </a:solidFill>
+              </a:rPr>
+              <a:t>분기마다 재학습</a:t>
             </a:r>
           </a:p>
         </p:txBody>
@@ -4340,7 +4364,7 @@
             <a:avLst/>
           </a:prstGeom>
           <a:solidFill>
-            <a:srgbClr val="1E5D95"/>
+            <a:srgbClr val="C2410C"/>
           </a:solidFill>
           <a:ln>
             <a:noFill/>
@@ -4383,11 +4407,11 @@
             <a:avLst/>
           </a:prstGeom>
           <a:solidFill>
-            <a:srgbClr val="FBFCFD"/>
+            <a:srgbClr val="FFFDFA"/>
           </a:solidFill>
           <a:ln w="15240">
             <a:solidFill>
-              <a:srgbClr val="1E5D95"/>
+              <a:srgbClr val="C2410C"/>
             </a:solidFill>
           </a:ln>
         </p:spPr>
@@ -4413,27 +4437,27 @@
             <a:r>
               <a:rPr sz="1700" b="1">
                 <a:solidFill>
-                  <a:srgbClr val="1E5D95"/>
-                </a:solidFill>
-              </a:rPr>
-              <a:t>웹</a:t>
+                  <a:srgbClr val="C2410C"/>
+                </a:solidFill>
+              </a:rPr>
+              <a:t>웹·배포</a:t>
             </a:r>
           </a:p>
           <a:p>
             <a:r>
               <a:rPr sz="1200">
                 <a:solidFill>
-                  <a:srgbClr val="4C5A68"/>
-                </a:solidFill>
-              </a:rPr>
-              <a:t>8챕터 리포트</a:t>
+                  <a:srgbClr val="6B5A49"/>
+                </a:solidFill>
+              </a:rPr>
+              <a:t>8챕터+EDA 리포트</a:t>
             </a:r>
           </a:p>
           <a:p>
             <a:r>
               <a:rPr sz="1200">
                 <a:solidFill>
-                  <a:srgbClr val="4C5A68"/>
+                  <a:srgbClr val="6B5A49"/>
                 </a:solidFill>
               </a:rPr>
               <a:t>실시간 계산기</a:t>
@@ -4443,10 +4467,10 @@
             <a:r>
               <a:rPr sz="1200">
                 <a:solidFill>
-                  <a:srgbClr val="4C5A68"/>
-                </a:solidFill>
-              </a:rPr>
-              <a:t>라이트/다크</a:t>
+                  <a:srgbClr val="6B5A49"/>
+                </a:solidFill>
+              </a:rPr>
+              <a:t>월간 자동 배포</a:t>
             </a:r>
           </a:p>
         </p:txBody>
@@ -4477,11 +4501,11 @@
             <a:r>
               <a:rPr sz="1500" b="1">
                 <a:solidFill>
-                  <a:srgbClr val="16202B"/>
-                </a:solidFill>
-                <a:latin typeface="Apple SD Gothic Neo"/>
-              </a:rPr>
-              <a:t>운영 원칙 — G2B 실무 시스템 운영에서 얻은 교훈의 이식</a:t>
+                  <a:srgbClr val="2B2016"/>
+                </a:solidFill>
+                <a:latin typeface="Apple SD Gothic Neo"/>
+              </a:rPr>
+              <a:t>운영 원칙 — 실무 시스템 운영에서 얻은 교훈의 이식</a:t>
             </a:r>
           </a:p>
           <a:p>
@@ -4489,7 +4513,7 @@
             <a:r>
               <a:rPr sz="1300" b="0">
                 <a:solidFill>
-                  <a:srgbClr val="4C5A68"/>
+                  <a:srgbClr val="6B5A49"/>
                 </a:solidFill>
                 <a:latin typeface="Apple SD Gothic Neo"/>
               </a:rPr>
@@ -4501,11 +4525,11 @@
             <a:r>
               <a:rPr sz="1300" b="0">
                 <a:solidFill>
-                  <a:srgbClr val="4C5A68"/>
-                </a:solidFill>
-                <a:latin typeface="Apple SD Gothic Neo"/>
-              </a:rPr>
-              <a:t>간헐 502에는 지수 백오프, 신청 반영 지연에는 자동 재프로브 — 수집 중단 지점부터 멱등 재개</a:t>
+                  <a:srgbClr val="6B5A49"/>
+                </a:solidFill>
+                <a:latin typeface="Apple SD Gothic Neo"/>
+              </a:rPr>
+              <a:t>빌드는 원자적 스왑(실패 시 직전 사이트 보존) · 행정구역 개편 같은 원천 변화도 수집기가 흡수한다</a:t>
             </a:r>
           </a:p>
         </p:txBody>
@@ -4524,7 +4548,7 @@
     <p:bg>
       <p:bgPr>
         <a:solidFill>
-          <a:srgbClr val="F4F6F8"/>
+          <a:srgbClr val="FAF7F2"/>
         </a:solidFill>
         <a:effectLst/>
       </p:bgPr>
@@ -4562,7 +4586,7 @@
             <a:r>
               <a:rPr sz="3000" b="1">
                 <a:solidFill>
-                  <a:srgbClr val="1E5D95"/>
+                  <a:srgbClr val="C2410C"/>
                 </a:solidFill>
                 <a:latin typeface="Apple SD Gothic Neo"/>
               </a:rPr>
@@ -4597,11 +4621,11 @@
             <a:r>
               <a:rPr sz="2600" b="1">
                 <a:solidFill>
-                  <a:srgbClr val="16202B"/>
-                </a:solidFill>
-                <a:latin typeface="Apple SD Gothic Neo"/>
-              </a:rPr>
-              <a:t>수지분석 모델 — 4모드, 이중 구현, 교차 검증</a:t>
+                  <a:srgbClr val="2B2016"/>
+                </a:solidFill>
+                <a:latin typeface="Apple SD Gothic Neo"/>
+              </a:rPr>
+              <a:t>수지분석 모델 — 4모드 + 수익형, 이중 구현, 교차 검증</a:t>
             </a:r>
           </a:p>
         </p:txBody>
@@ -4632,11 +4656,11 @@
             <a:r>
               <a:rPr sz="1300" b="0">
                 <a:solidFill>
-                  <a:srgbClr val="4C5A68"/>
-                </a:solidFill>
-                <a:latin typeface="Apple SD Gothic Neo"/>
-              </a:rPr>
-              <a:t>신축분양 · 재개발 · 재건축 · 리모델링</a:t>
+                  <a:srgbClr val="6B5A49"/>
+                </a:solidFill>
+                <a:latin typeface="Apple SD Gothic Neo"/>
+              </a:rPr>
+              <a:t>신축분양 · 재개발 · 재건축 · 리모델링 · 오피스/상업 수익형</a:t>
             </a:r>
           </a:p>
         </p:txBody>
@@ -4656,7 +4680,7 @@
             <a:avLst/>
           </a:prstGeom>
           <a:solidFill>
-            <a:srgbClr val="1E5D95"/>
+            <a:srgbClr val="C2410C"/>
           </a:solidFill>
           <a:ln>
             <a:noFill/>
@@ -4710,7 +4734,7 @@
             <a:r>
               <a:rPr sz="1600" b="1">
                 <a:solidFill>
-                  <a:srgbClr val="1E5D95"/>
+                  <a:srgbClr val="C2410C"/>
                 </a:solidFill>
                 <a:latin typeface="Apple SD Gothic Neo"/>
               </a:rPr>
@@ -4722,11 +4746,11 @@
             <a:r>
               <a:rPr sz="1400" b="0">
                 <a:solidFill>
-                  <a:srgbClr val="16202B"/>
-                </a:solidFill>
-                <a:latin typeface="Apple SD Gothic Neo"/>
-              </a:rPr>
-              <a:t>수입(분양) − 지출 6갈래(토지·공사·간접·판매·금융·예비)</a:t>
+                  <a:srgbClr val="2B2016"/>
+                </a:solidFill>
+                <a:latin typeface="Apple SD Gothic Neo"/>
+              </a:rPr>
+              <a:t>수입(분양) − 지출 여섯 항목(토지·공사·간접·판매·금융·예비)</a:t>
             </a:r>
           </a:p>
           <a:p>
@@ -4734,7 +4758,7 @@
             <a:r>
               <a:rPr sz="1400" b="0">
                 <a:solidFill>
-                  <a:srgbClr val="16202B"/>
+                  <a:srgbClr val="2B2016"/>
                 </a:solidFill>
                 <a:latin typeface="Apple SD Gothic Neo"/>
               </a:rPr>
@@ -4746,7 +4770,7 @@
             <a:r>
               <a:rPr sz="800" b="0">
                 <a:solidFill>
-                  <a:srgbClr val="16202B"/>
+                  <a:srgbClr val="2B2016"/>
                 </a:solidFill>
                 <a:latin typeface="Apple SD Gothic Neo"/>
               </a:rPr>
@@ -4758,11 +4782,11 @@
             <a:r>
               <a:rPr sz="1600" b="1">
                 <a:solidFill>
-                  <a:srgbClr val="1E5D95"/>
-                </a:solidFill>
-                <a:latin typeface="Apple SD Gothic Neo"/>
-              </a:rPr>
-              <a:t>정비사업 고유 문법</a:t>
+                  <a:srgbClr val="C2410C"/>
+                </a:solidFill>
+                <a:latin typeface="Apple SD Gothic Neo"/>
+              </a:rPr>
+              <a:t>정비사업 고유 계산</a:t>
             </a:r>
           </a:p>
           <a:p>
@@ -4770,7 +4794,7 @@
             <a:r>
               <a:rPr sz="1400" b="0">
                 <a:solidFill>
-                  <a:srgbClr val="16202B"/>
+                  <a:srgbClr val="2B2016"/>
                 </a:solidFill>
                 <a:latin typeface="Apple SD Gothic Neo"/>
               </a:rPr>
@@ -4782,7 +4806,7 @@
             <a:r>
               <a:rPr sz="1400" b="0">
                 <a:solidFill>
-                  <a:srgbClr val="16202B"/>
+                  <a:srgbClr val="2B2016"/>
                 </a:solidFill>
                 <a:latin typeface="Apple SD Gothic Neo"/>
               </a:rPr>
@@ -4794,7 +4818,7 @@
             <a:r>
               <a:rPr sz="800" b="0">
                 <a:solidFill>
-                  <a:srgbClr val="16202B"/>
+                  <a:srgbClr val="2B2016"/>
                 </a:solidFill>
                 <a:latin typeface="Apple SD Gothic Neo"/>
               </a:rPr>
@@ -4806,11 +4830,11 @@
             <a:r>
               <a:rPr sz="1600" b="1">
                 <a:solidFill>
-                  <a:srgbClr val="1E5D95"/>
-                </a:solidFill>
-                <a:latin typeface="Apple SD Gothic Neo"/>
-              </a:rPr>
-              <a:t>토지 모듈</a:t>
+                  <a:srgbClr val="C2410C"/>
+                </a:solidFill>
+                <a:latin typeface="Apple SD Gothic Neo"/>
+              </a:rPr>
+              <a:t>수익형(오피스·상업)</a:t>
             </a:r>
           </a:p>
           <a:p>
@@ -4818,11 +4842,11 @@
             <a:r>
               <a:rPr sz="1400" b="0">
                 <a:solidFill>
-                  <a:srgbClr val="16202B"/>
-                </a:solidFill>
-                <a:latin typeface="Apple SD Gothic Neo"/>
-              </a:rPr>
-              <a:t>용도지역(국계법 시행령·서울조례) → 건폐율·용적률</a:t>
+                  <a:srgbClr val="2B2016"/>
+                </a:solidFill>
+                <a:latin typeface="Apple SD Gothic Neo"/>
+              </a:rPr>
+              <a:t>NOI = 임대면적×임대료×(1−공실)×(1−경비율)</a:t>
             </a:r>
           </a:p>
           <a:p>
@@ -4830,11 +4854,11 @@
             <a:r>
               <a:rPr sz="1400" b="0">
                 <a:solidFill>
-                  <a:srgbClr val="16202B"/>
-                </a:solidFill>
-                <a:latin typeface="Apple SD Gothic Neo"/>
-              </a:rPr>
-              <a:t>→ 연면적 → 추정 세대수 → 수지 입력 자동 주입</a:t>
+                  <a:srgbClr val="2B2016"/>
+                </a:solidFill>
+                <a:latin typeface="Apple SD Gothic Neo"/>
+              </a:rPr>
+              <a:t>매각가치 = NOI ÷ 환원율 — 준공 시점 일시 유입으로 편성</a:t>
             </a:r>
           </a:p>
         </p:txBody>
@@ -4865,7 +4889,7 @@
             <a:r>
               <a:rPr sz="1600" b="1">
                 <a:solidFill>
-                  <a:srgbClr val="C23B2E"/>
+                  <a:srgbClr val="1E5D95"/>
                 </a:solidFill>
                 <a:latin typeface="Apple SD Gothic Neo"/>
               </a:rPr>
@@ -4877,7 +4901,7 @@
             <a:r>
               <a:rPr sz="600" b="0">
                 <a:solidFill>
-                  <a:srgbClr val="16202B"/>
+                  <a:srgbClr val="2B2016"/>
                 </a:solidFill>
                 <a:latin typeface="Apple SD Gothic Neo"/>
               </a:rPr>
@@ -4889,11 +4913,11 @@
             <a:r>
               <a:rPr sz="1400" b="1">
                 <a:solidFill>
-                  <a:srgbClr val="16202B"/>
-                </a:solidFill>
-                <a:latin typeface="Apple SD Gothic Neo"/>
-              </a:rPr>
-              <a:t>148개 pytest — 수기검산 대조·경계·회귀</a:t>
+                  <a:srgbClr val="2B2016"/>
+                </a:solidFill>
+                <a:latin typeface="Apple SD Gothic Neo"/>
+              </a:rPr>
+              <a:t>162개 pytest — 수기검산 대조·경계·회귀</a:t>
             </a:r>
           </a:p>
           <a:p>
@@ -4901,7 +4925,7 @@
             <a:r>
               <a:rPr sz="400" b="0">
                 <a:solidFill>
-                  <a:srgbClr val="16202B"/>
+                  <a:srgbClr val="2B2016"/>
                 </a:solidFill>
                 <a:latin typeface="Apple SD Gothic Neo"/>
               </a:rPr>
@@ -4913,11 +4937,11 @@
             <a:r>
               <a:rPr sz="1400" b="1">
                 <a:solidFill>
-                  <a:srgbClr val="16202B"/>
-                </a:solidFill>
-                <a:latin typeface="Apple SD Gothic Neo"/>
-              </a:rPr>
-              <a:t>Python ↔ JavaScript 패리티</a:t>
+                  <a:srgbClr val="2B2016"/>
+                </a:solidFill>
+                <a:latin typeface="Apple SD Gothic Neo"/>
+              </a:rPr>
+              <a:t>Python ↔ JavaScript 패리티 78조</a:t>
             </a:r>
           </a:p>
           <a:p>
@@ -4925,11 +4949,35 @@
             <a:r>
               <a:rPr sz="1300" b="0">
                 <a:solidFill>
-                  <a:srgbClr val="4C5A68"/>
-                </a:solidFill>
-                <a:latin typeface="Apple SD Gothic Neo"/>
-              </a:rPr>
-              <a:t>무작위 입력 90조 전 출력 |Δ| &lt; 1e-6</a:t>
+                  <a:srgbClr val="6B5A49"/>
+                </a:solidFill>
+                <a:latin typeface="Apple SD Gothic Neo"/>
+              </a:rPr>
+              <a:t>전 출력 |Δ| &lt; 1e-6 강제 (실측 최대 상대오차 2.5e-15)</a:t>
+            </a:r>
+          </a:p>
+          <a:p>
+            <a:pPr algn="l"/>
+            <a:r>
+              <a:rPr sz="400" b="0">
+                <a:solidFill>
+                  <a:srgbClr val="2B2016"/>
+                </a:solidFill>
+                <a:latin typeface="Apple SD Gothic Neo"/>
+              </a:rPr>
+              <a:t/>
+            </a:r>
+          </a:p>
+          <a:p>
+            <a:pPr algn="l"/>
+            <a:r>
+              <a:rPr sz="1400" b="1">
+                <a:solidFill>
+                  <a:srgbClr val="2B2016"/>
+                </a:solidFill>
+                <a:latin typeface="Apple SD Gothic Neo"/>
+              </a:rPr>
+              <a:t>독립 재구현 3-way 대조</a:t>
             </a:r>
           </a:p>
           <a:p>
@@ -4937,11 +4985,11 @@
             <a:r>
               <a:rPr sz="1300" b="0">
                 <a:solidFill>
-                  <a:srgbClr val="4C5A68"/>
-                </a:solidFill>
-                <a:latin typeface="Apple SD Gothic Neo"/>
-              </a:rPr>
-              <a:t>(실측 최대 상대오차 1.6e-14 — 사실상 비트 일치)</a:t>
+                  <a:srgbClr val="6B5A49"/>
+                </a:solidFill>
+                <a:latin typeface="Apple SD Gothic Neo"/>
+              </a:rPr>
+              <a:t>명세만 보고 새로 짠 검산기와 양 엔진의 수치 완전 일치</a:t>
             </a:r>
           </a:p>
           <a:p>
@@ -4949,7 +4997,7 @@
             <a:r>
               <a:rPr sz="400" b="0">
                 <a:solidFill>
-                  <a:srgbClr val="16202B"/>
+                  <a:srgbClr val="2B2016"/>
                 </a:solidFill>
                 <a:latin typeface="Apple SD Gothic Neo"/>
               </a:rPr>
@@ -4961,11 +5009,11 @@
             <a:r>
               <a:rPr sz="1400" b="1">
                 <a:solidFill>
-                  <a:srgbClr val="16202B"/>
-                </a:solidFill>
-                <a:latin typeface="Apple SD Gothic Neo"/>
-              </a:rPr>
-              <a:t>외부 교차 리뷰 2회 (codex)</a:t>
+                  <a:srgbClr val="2B2016"/>
+                </a:solidFill>
+                <a:latin typeface="Apple SD Gothic Neo"/>
+              </a:rPr>
+              <a:t>적대적 교차 검증 4회</a:t>
             </a:r>
           </a:p>
           <a:p>
@@ -4973,11 +5021,11 @@
             <a:r>
               <a:rPr sz="1300" b="0">
                 <a:solidFill>
-                  <a:srgbClr val="4C5A68"/>
-                </a:solidFill>
-                <a:latin typeface="Apple SD Gothic Neo"/>
-              </a:rPr>
-              <a:t>수식·이식·데이터 계약·보안 이스케이프 반영</a:t>
+                  <a:srgbClr val="6B5A49"/>
+                </a:solidFill>
+                <a:latin typeface="Apple SD Gothic Neo"/>
+              </a:rPr>
+              <a:t>외부 모델·다중 에이전트 — 수식·이식·접근성·UX 실측</a:t>
             </a:r>
           </a:p>
         </p:txBody>
@@ -4996,7 +5044,7 @@
     <p:bg>
       <p:bgPr>
         <a:solidFill>
-          <a:srgbClr val="F4F6F8"/>
+          <a:srgbClr val="FAF7F2"/>
         </a:solidFill>
         <a:effectLst/>
       </p:bgPr>
@@ -5034,7 +5082,7 @@
             <a:r>
               <a:rPr sz="3000" b="1">
                 <a:solidFill>
-                  <a:srgbClr val="1E5D95"/>
+                  <a:srgbClr val="C2410C"/>
                 </a:solidFill>
                 <a:latin typeface="Apple SD Gothic Neo"/>
               </a:rPr>
@@ -5069,7 +5117,7 @@
             <a:r>
               <a:rPr sz="2600" b="1">
                 <a:solidFill>
-                  <a:srgbClr val="16202B"/>
+                  <a:srgbClr val="2B2016"/>
                 </a:solidFill>
                 <a:latin typeface="Apple SD Gothic Neo"/>
               </a:rPr>
@@ -5104,7 +5152,7 @@
             <a:r>
               <a:rPr sz="1300" b="0">
                 <a:solidFill>
-                  <a:srgbClr val="4C5A68"/>
+                  <a:srgbClr val="6B5A49"/>
                 </a:solidFill>
                 <a:latin typeface="Apple SD Gothic Neo"/>
               </a:rPr>
@@ -5128,7 +5176,7 @@
             <a:avLst/>
           </a:prstGeom>
           <a:solidFill>
-            <a:srgbClr val="1E5D95"/>
+            <a:srgbClr val="C2410C"/>
           </a:solidFill>
           <a:ln>
             <a:noFill/>
@@ -5182,7 +5230,7 @@
             <a:r>
               <a:rPr sz="1600" b="1">
                 <a:solidFill>
-                  <a:srgbClr val="1E5D95"/>
+                  <a:srgbClr val="C2410C"/>
                 </a:solidFill>
                 <a:latin typeface="Apple SD Gothic Neo"/>
               </a:rPr>
@@ -5217,7 +5265,7 @@
             <a:r>
               <a:rPr sz="1500" b="1">
                 <a:solidFill>
-                  <a:srgbClr val="1E5D95"/>
+                  <a:srgbClr val="C2410C"/>
                 </a:solidFill>
                 <a:latin typeface="Apple SD Gothic Neo"/>
               </a:rPr>
@@ -5252,7 +5300,7 @@
             <a:r>
               <a:rPr sz="1500" b="1">
                 <a:solidFill>
-                  <a:srgbClr val="1E5D95"/>
+                  <a:srgbClr val="C2410C"/>
                 </a:solidFill>
                 <a:latin typeface="Apple SD Gothic Neo"/>
               </a:rPr>
@@ -5287,7 +5335,7 @@
             <a:r>
               <a:rPr sz="1250" b="0">
                 <a:solidFill>
-                  <a:srgbClr val="4C5A68"/>
+                  <a:srgbClr val="6B5A49"/>
                 </a:solidFill>
                 <a:latin typeface="Apple SD Gothic Neo"/>
               </a:rPr>
@@ -5322,7 +5370,7 @@
             <a:r>
               <a:rPr sz="1600" b="0">
                 <a:solidFill>
-                  <a:srgbClr val="16202B"/>
+                  <a:srgbClr val="2B2016"/>
                 </a:solidFill>
                 <a:latin typeface="Apple SD Gothic Neo"/>
               </a:rPr>
@@ -5357,7 +5405,7 @@
             <a:r>
               <a:rPr sz="1500" b="0">
                 <a:solidFill>
-                  <a:srgbClr val="16202B"/>
+                  <a:srgbClr val="2B2016"/>
                 </a:solidFill>
                 <a:latin typeface="Apple SD Gothic Neo"/>
               </a:rPr>
@@ -5392,7 +5440,7 @@
             <a:r>
               <a:rPr sz="1500" b="0">
                 <a:solidFill>
-                  <a:srgbClr val="16202B"/>
+                  <a:srgbClr val="2B2016"/>
                 </a:solidFill>
                 <a:latin typeface="Apple SD Gothic Neo"/>
               </a:rPr>
@@ -5427,7 +5475,7 @@
             <a:r>
               <a:rPr sz="1250" b="0">
                 <a:solidFill>
-                  <a:srgbClr val="4C5A68"/>
+                  <a:srgbClr val="6B5A49"/>
                 </a:solidFill>
                 <a:latin typeface="Apple SD Gothic Neo"/>
               </a:rPr>
@@ -5462,7 +5510,7 @@
             <a:r>
               <a:rPr sz="1600" b="0">
                 <a:solidFill>
-                  <a:srgbClr val="16202B"/>
+                  <a:srgbClr val="2B2016"/>
                 </a:solidFill>
                 <a:latin typeface="Apple SD Gothic Neo"/>
               </a:rPr>
@@ -5497,7 +5545,7 @@
             <a:r>
               <a:rPr sz="1500" b="0">
                 <a:solidFill>
-                  <a:srgbClr val="16202B"/>
+                  <a:srgbClr val="2B2016"/>
                 </a:solidFill>
                 <a:latin typeface="Apple SD Gothic Neo"/>
               </a:rPr>
@@ -5532,7 +5580,7 @@
             <a:r>
               <a:rPr sz="1500" b="0">
                 <a:solidFill>
-                  <a:srgbClr val="16202B"/>
+                  <a:srgbClr val="2B2016"/>
                 </a:solidFill>
                 <a:latin typeface="Apple SD Gothic Neo"/>
               </a:rPr>
@@ -5567,7 +5615,7 @@
             <a:r>
               <a:rPr sz="1250" b="0">
                 <a:solidFill>
-                  <a:srgbClr val="4C5A68"/>
+                  <a:srgbClr val="6B5A49"/>
                 </a:solidFill>
                 <a:latin typeface="Apple SD Gothic Neo"/>
               </a:rPr>
@@ -5602,7 +5650,7 @@
             <a:r>
               <a:rPr sz="1600" b="0">
                 <a:solidFill>
-                  <a:srgbClr val="4C5A68"/>
+                  <a:srgbClr val="6B5A49"/>
                 </a:solidFill>
                 <a:latin typeface="Apple SD Gothic Neo"/>
               </a:rPr>
@@ -5637,7 +5685,7 @@
             <a:r>
               <a:rPr sz="1500" b="0">
                 <a:solidFill>
-                  <a:srgbClr val="4C5A68"/>
+                  <a:srgbClr val="6B5A49"/>
                 </a:solidFill>
                 <a:latin typeface="Apple SD Gothic Neo"/>
               </a:rPr>
@@ -5672,7 +5720,7 @@
             <a:r>
               <a:rPr sz="1500" b="0">
                 <a:solidFill>
-                  <a:srgbClr val="4C5A68"/>
+                  <a:srgbClr val="6B5A49"/>
                 </a:solidFill>
                 <a:latin typeface="Apple SD Gothic Neo"/>
               </a:rPr>
@@ -5707,7 +5755,7 @@
             <a:r>
               <a:rPr sz="1250" b="0">
                 <a:solidFill>
-                  <a:srgbClr val="4C5A68"/>
+                  <a:srgbClr val="6B5A49"/>
                 </a:solidFill>
                 <a:latin typeface="Apple SD Gothic Neo"/>
               </a:rPr>
@@ -5742,7 +5790,7 @@
             <a:r>
               <a:rPr sz="1600" b="0">
                 <a:solidFill>
-                  <a:srgbClr val="4C5A68"/>
+                  <a:srgbClr val="6B5A49"/>
                 </a:solidFill>
                 <a:latin typeface="Apple SD Gothic Neo"/>
               </a:rPr>
@@ -5777,7 +5825,7 @@
             <a:r>
               <a:rPr sz="1500" b="0">
                 <a:solidFill>
-                  <a:srgbClr val="4C5A68"/>
+                  <a:srgbClr val="6B5A49"/>
                 </a:solidFill>
                 <a:latin typeface="Apple SD Gothic Neo"/>
               </a:rPr>
@@ -5812,7 +5860,7 @@
             <a:r>
               <a:rPr sz="1500" b="0">
                 <a:solidFill>
-                  <a:srgbClr val="4C5A68"/>
+                  <a:srgbClr val="6B5A49"/>
                 </a:solidFill>
                 <a:latin typeface="Apple SD Gothic Neo"/>
               </a:rPr>
@@ -5847,7 +5895,7 @@
             <a:r>
               <a:rPr sz="1250" b="0">
                 <a:solidFill>
-                  <a:srgbClr val="4C5A68"/>
+                  <a:srgbClr val="6B5A49"/>
                 </a:solidFill>
                 <a:latin typeface="Apple SD Gothic Neo"/>
               </a:rPr>
@@ -5882,7 +5930,7 @@
             <a:r>
               <a:rPr sz="1600" b="0">
                 <a:solidFill>
-                  <a:srgbClr val="4C5A68"/>
+                  <a:srgbClr val="6B5A49"/>
                 </a:solidFill>
                 <a:latin typeface="Apple SD Gothic Neo"/>
               </a:rPr>
@@ -5917,7 +5965,7 @@
             <a:r>
               <a:rPr sz="1500" b="0">
                 <a:solidFill>
-                  <a:srgbClr val="4C5A68"/>
+                  <a:srgbClr val="6B5A49"/>
                 </a:solidFill>
                 <a:latin typeface="Apple SD Gothic Neo"/>
               </a:rPr>
@@ -5952,7 +6000,7 @@
             <a:r>
               <a:rPr sz="1500" b="0">
                 <a:solidFill>
-                  <a:srgbClr val="4C5A68"/>
+                  <a:srgbClr val="6B5A49"/>
                 </a:solidFill>
                 <a:latin typeface="Apple SD Gothic Neo"/>
               </a:rPr>
@@ -5987,7 +6035,7 @@
             <a:r>
               <a:rPr sz="1250" b="0">
                 <a:solidFill>
-                  <a:srgbClr val="4C5A68"/>
+                  <a:srgbClr val="6B5A49"/>
                 </a:solidFill>
                 <a:latin typeface="Apple SD Gothic Neo"/>
               </a:rPr>
@@ -6022,11 +6070,11 @@
             <a:r>
               <a:rPr sz="1500" b="1">
                 <a:solidFill>
-                  <a:srgbClr val="C23B2E"/>
-                </a:solidFill>
-                <a:latin typeface="Apple SD Gothic Neo"/>
-              </a:rPr>
-              <a:t>방법론적 입장</a:t>
+                  <a:srgbClr val="1E5D95"/>
+                </a:solidFill>
+                <a:latin typeface="Apple SD Gothic Neo"/>
+              </a:rPr>
+              <a:t>정직한 보고 원칙</a:t>
             </a:r>
           </a:p>
           <a:p>
@@ -6034,7 +6082,7 @@
             <a:r>
               <a:rPr sz="1350" b="0">
                 <a:solidFill>
-                  <a:srgbClr val="16202B"/>
+                  <a:srgbClr val="2B2016"/>
                 </a:solidFill>
                 <a:latin typeface="Apple SD Gothic Neo"/>
               </a:rPr>
@@ -6046,7 +6094,7 @@
             <a:r>
               <a:rPr sz="1350" b="0">
                 <a:solidFill>
-                  <a:srgbClr val="16202B"/>
+                  <a:srgbClr val="2B2016"/>
                 </a:solidFill>
                 <a:latin typeface="Apple SD Gothic Neo"/>
               </a:rPr>
@@ -6069,7 +6117,7 @@
     <p:bg>
       <p:bgPr>
         <a:solidFill>
-          <a:srgbClr val="F4F6F8"/>
+          <a:srgbClr val="FAF7F2"/>
         </a:solidFill>
         <a:effectLst/>
       </p:bgPr>
@@ -6107,7 +6155,7 @@
             <a:r>
               <a:rPr sz="3000" b="1">
                 <a:solidFill>
-                  <a:srgbClr val="1E5D95"/>
+                  <a:srgbClr val="C2410C"/>
                 </a:solidFill>
                 <a:latin typeface="Apple SD Gothic Neo"/>
               </a:rPr>
@@ -6142,7 +6190,7 @@
             <a:r>
               <a:rPr sz="2600" b="1">
                 <a:solidFill>
-                  <a:srgbClr val="16202B"/>
+                  <a:srgbClr val="2B2016"/>
                 </a:solidFill>
                 <a:latin typeface="Apple SD Gothic Neo"/>
               </a:rPr>
@@ -6177,11 +6225,11 @@
             <a:r>
               <a:rPr sz="1300" b="0">
                 <a:solidFill>
-                  <a:srgbClr val="4C5A68"/>
-                </a:solidFill>
-                <a:latin typeface="Apple SD Gothic Neo"/>
-              </a:rPr>
-              <a:t>18개 시도 스몰멀티플(선택 연동) · 국면 맵 · 마진 스퀴즈 · 12개월 예측 팬차트</a:t>
+                  <a:srgbClr val="6B5A49"/>
+                </a:solidFill>
+                <a:latin typeface="Apple SD Gothic Neo"/>
+              </a:rPr>
+              <a:t>17개 시도 스몰멀티플(선택 연동) · 서울 25개 구 전수 195,863건 — 강남3구가 비강남의 1.87배</a:t>
             </a:r>
           </a:p>
         </p:txBody>
@@ -6201,7 +6249,7 @@
             <a:avLst/>
           </a:prstGeom>
           <a:solidFill>
-            <a:srgbClr val="1E5D95"/>
+            <a:srgbClr val="C2410C"/>
           </a:solidFill>
           <a:ln>
             <a:noFill/>
@@ -6231,7 +6279,7 @@
       </p:sp>
       <p:pic>
         <p:nvPicPr>
-          <p:cNvPr id="6" name="Picture 5" descr="02-시장.png"/>
+          <p:cNvPr id="6" name="Picture 5" descr="_crop_02-시장.png"/>
           <p:cNvPicPr>
             <a:picLocks noChangeAspect="1"/>
           </p:cNvPicPr>
@@ -6245,8 +6293,8 @@
         </p:blipFill>
         <p:spPr>
           <a:xfrm>
-            <a:off x="3858768" y="1600200"/>
-            <a:ext cx="4443984" cy="4937760"/>
+            <a:off x="2678667" y="1600200"/>
+            <a:ext cx="6804186" cy="4937760"/>
           </a:xfrm>
           <a:prstGeom prst="rect">
             <a:avLst/>
@@ -6267,7 +6315,7 @@
     <p:bg>
       <p:bgPr>
         <a:solidFill>
-          <a:srgbClr val="F4F6F8"/>
+          <a:srgbClr val="FAF7F2"/>
         </a:solidFill>
         <a:effectLst/>
       </p:bgPr>
@@ -6305,7 +6353,7 @@
             <a:r>
               <a:rPr sz="3000" b="1">
                 <a:solidFill>
-                  <a:srgbClr val="1E5D95"/>
+                  <a:srgbClr val="C2410C"/>
                 </a:solidFill>
                 <a:latin typeface="Apple SD Gothic Neo"/>
               </a:rPr>
@@ -6340,7 +6388,7 @@
             <a:r>
               <a:rPr sz="2600" b="1">
                 <a:solidFill>
-                  <a:srgbClr val="16202B"/>
+                  <a:srgbClr val="2B2016"/>
                 </a:solidFill>
                 <a:latin typeface="Apple SD Gothic Neo"/>
               </a:rPr>
@@ -6375,11 +6423,11 @@
             <a:r>
               <a:rPr sz="1300" b="0">
                 <a:solidFill>
-                  <a:srgbClr val="4C5A68"/>
-                </a:solidFill>
-                <a:latin typeface="Apple SD Gothic Neo"/>
-              </a:rPr>
-              <a:t>토지(용도지역)→세대수 자동 도출 · 4모드 · 워터폴·게이지 · 시나리오 A/B</a:t>
+                  <a:srgbClr val="6B5A49"/>
+                </a:solidFill>
+                <a:latin typeface="Apple SD Gothic Neo"/>
+              </a:rPr>
+              <a:t>토지(용도지역)→세대수 자동 도출 · 4모드+수익형 · 워터폴·게이지 · 시나리오 A/B</a:t>
             </a:r>
           </a:p>
         </p:txBody>
@@ -6399,7 +6447,7 @@
             <a:avLst/>
           </a:prstGeom>
           <a:solidFill>
-            <a:srgbClr val="1E5D95"/>
+            <a:srgbClr val="C2410C"/>
           </a:solidFill>
           <a:ln>
             <a:noFill/>
@@ -6429,7 +6477,7 @@
       </p:sp>
       <p:pic>
         <p:nvPicPr>
-          <p:cNvPr id="6" name="Picture 5" descr="03-계산기.png"/>
+          <p:cNvPr id="6" name="Picture 5" descr="_crop_03-계산기.png"/>
           <p:cNvPicPr>
             <a:picLocks noChangeAspect="1"/>
           </p:cNvPicPr>
@@ -6443,8 +6491,8 @@
         </p:blipFill>
         <p:spPr>
           <a:xfrm>
-            <a:off x="3710635" y="1600200"/>
-            <a:ext cx="4740249" cy="4937760"/>
+            <a:off x="2764354" y="1600200"/>
+            <a:ext cx="6632811" cy="4937760"/>
           </a:xfrm>
           <a:prstGeom prst="rect">
             <a:avLst/>
@@ -6465,7 +6513,7 @@
     <p:bg>
       <p:bgPr>
         <a:solidFill>
-          <a:srgbClr val="F4F6F8"/>
+          <a:srgbClr val="FAF7F2"/>
         </a:solidFill>
         <a:effectLst/>
       </p:bgPr>
@@ -6503,7 +6551,7 @@
             <a:r>
               <a:rPr sz="3000" b="1">
                 <a:solidFill>
-                  <a:srgbClr val="1E5D95"/>
+                  <a:srgbClr val="C2410C"/>
                 </a:solidFill>
                 <a:latin typeface="Apple SD Gothic Neo"/>
               </a:rPr>
@@ -6538,11 +6586,11 @@
             <a:r>
               <a:rPr sz="2600" b="1">
                 <a:solidFill>
-                  <a:srgbClr val="16202B"/>
-                </a:solidFill>
-                <a:latin typeface="Apple SD Gothic Neo"/>
-              </a:rPr>
-              <a:t>웹 — 민감도·상권 &amp; 다크 모드</a:t>
+                  <a:srgbClr val="2B2016"/>
+                </a:solidFill>
+                <a:latin typeface="Apple SD Gothic Neo"/>
+              </a:rPr>
+              <a:t>웹 — 민감도 &amp; 다크 모드</a:t>
             </a:r>
           </a:p>
         </p:txBody>
@@ -6573,11 +6621,11 @@
             <a:r>
               <a:rPr sz="1300" b="0">
                 <a:solidFill>
-                  <a:srgbClr val="4C5A68"/>
-                </a:solidFill>
-                <a:latin typeface="Apple SD Gothic Neo"/>
-              </a:rPr>
-              <a:t>토네이도·손익분기 히트맵(계산기 연동) · 272만 업소 상권 · 완전한 다크 테마</a:t>
+                  <a:srgbClr val="6B5A49"/>
+                </a:solidFill>
+                <a:latin typeface="Apple SD Gothic Neo"/>
+              </a:rPr>
+              <a:t>토네이도 · 손익분기 히트맵(셀 수치 직접 표기, 계산기 연동) · 완전한 다크 테마 · 모바일 실측 검증</a:t>
             </a:r>
           </a:p>
         </p:txBody>
@@ -6597,7 +6645,7 @@
             <a:avLst/>
           </a:prstGeom>
           <a:solidFill>
-            <a:srgbClr val="1E5D95"/>
+            <a:srgbClr val="C2410C"/>
           </a:solidFill>
           <a:ln>
             <a:noFill/>
@@ -6641,8 +6689,8 @@
         </p:blipFill>
         <p:spPr>
           <a:xfrm>
-            <a:off x="4179590" y="1600200"/>
-            <a:ext cx="3802339" cy="4937760"/>
+            <a:off x="2130552" y="1600200"/>
+            <a:ext cx="7900416" cy="4937760"/>
           </a:xfrm>
           <a:prstGeom prst="rect">
             <a:avLst/>
@@ -6665,8 +6713,8 @@
         </p:blipFill>
         <p:spPr>
           <a:xfrm>
-            <a:off x="7785202" y="3566160"/>
-            <a:ext cx="2809036" cy="2926080"/>
+            <a:off x="6972059" y="3566160"/>
+            <a:ext cx="4435321" cy="2926080"/>
           </a:xfrm>
           <a:prstGeom prst="rect">
             <a:avLst/>
@@ -6687,7 +6735,7 @@
     <p:bg>
       <p:bgPr>
         <a:solidFill>
-          <a:srgbClr val="F4F6F8"/>
+          <a:srgbClr val="FAF7F2"/>
         </a:solidFill>
         <a:effectLst/>
       </p:bgPr>
@@ -6725,7 +6773,7 @@
             <a:r>
               <a:rPr sz="3000" b="1">
                 <a:solidFill>
-                  <a:srgbClr val="1E5D95"/>
+                  <a:srgbClr val="C2410C"/>
                 </a:solidFill>
                 <a:latin typeface="Apple SD Gothic Neo"/>
               </a:rPr>
@@ -6760,7 +6808,7 @@
             <a:r>
               <a:rPr sz="2600" b="1">
                 <a:solidFill>
-                  <a:srgbClr val="16202B"/>
+                  <a:srgbClr val="2B2016"/>
                 </a:solidFill>
                 <a:latin typeface="Apple SD Gothic Neo"/>
               </a:rPr>
@@ -6795,7 +6843,7 @@
             <a:r>
               <a:rPr sz="1300" b="0">
                 <a:solidFill>
-                  <a:srgbClr val="4C5A68"/>
+                  <a:srgbClr val="6B5A49"/>
                 </a:solidFill>
                 <a:latin typeface="Apple SD Gothic Neo"/>
               </a:rPr>
@@ -6819,7 +6867,7 @@
             <a:avLst/>
           </a:prstGeom>
           <a:solidFill>
-            <a:srgbClr val="1E5D95"/>
+            <a:srgbClr val="C2410C"/>
           </a:solidFill>
           <a:ln>
             <a:noFill/>
@@ -6873,7 +6921,7 @@
             <a:r>
               <a:rPr sz="1600" b="1">
                 <a:solidFill>
-                  <a:srgbClr val="1E5D95"/>
+                  <a:srgbClr val="C2410C"/>
                 </a:solidFill>
                 <a:latin typeface="Apple SD Gothic Neo"/>
               </a:rPr>
@@ -6885,11 +6933,11 @@
             <a:r>
               <a:rPr sz="1400" b="0">
                 <a:solidFill>
-                  <a:srgbClr val="16202B"/>
-                </a:solidFill>
-                <a:latin typeface="Apple SD Gothic Neo"/>
-              </a:rPr>
-              <a:t>Python (수집·모델·베이크) · pytest 148</a:t>
+                  <a:srgbClr val="2B2016"/>
+                </a:solidFill>
+                <a:latin typeface="Apple SD Gothic Neo"/>
+              </a:rPr>
+              <a:t>Python (수집·모델·빌드) · pytest 162</a:t>
             </a:r>
           </a:p>
           <a:p>
@@ -6897,7 +6945,7 @@
             <a:r>
               <a:rPr sz="1400" b="0">
                 <a:solidFill>
-                  <a:srgbClr val="16202B"/>
+                  <a:srgbClr val="2B2016"/>
                 </a:solidFill>
                 <a:latin typeface="Apple SD Gothic Neo"/>
               </a:rPr>
@@ -6909,11 +6957,11 @@
             <a:r>
               <a:rPr sz="1400" b="0">
                 <a:solidFill>
-                  <a:srgbClr val="16202B"/>
-                </a:solidFill>
-                <a:latin typeface="Apple SD Gothic Neo"/>
-              </a:rPr>
-              <a:t>바닐라 JS/SVG 차트 라이브러리 자작 (외부 의존 0)</a:t>
+                  <a:srgbClr val="2B2016"/>
+                </a:solidFill>
+                <a:latin typeface="Apple SD Gothic Neo"/>
+              </a:rPr>
+              <a:t>바닐라 JS/SVG 차트 자작 — 드래그 확대·월/분기/연 전환, 의존 0</a:t>
             </a:r>
           </a:p>
           <a:p>
@@ -6921,11 +6969,11 @@
             <a:r>
               <a:rPr sz="1400" b="0">
                 <a:solidFill>
-                  <a:srgbClr val="16202B"/>
-                </a:solidFill>
-                <a:latin typeface="Apple SD Gothic Neo"/>
-              </a:rPr>
-              <a:t>공공 API 8종 (data.go.kr · ECOS · KOSIS · R-ONE · HUG · 소진공)</a:t>
+                  <a:srgbClr val="2B2016"/>
+                </a:solidFill>
+                <a:latin typeface="Apple SD Gothic Neo"/>
+              </a:rPr>
+              <a:t>공공 API 7개 기관 14종 (data.go.kr · ECOS · KOSIS · R-ONE 등)</a:t>
             </a:r>
           </a:p>
           <a:p>
@@ -6933,7 +6981,7 @@
             <a:r>
               <a:rPr sz="800" b="0">
                 <a:solidFill>
-                  <a:srgbClr val="16202B"/>
+                  <a:srgbClr val="2B2016"/>
                 </a:solidFill>
                 <a:latin typeface="Apple SD Gothic Neo"/>
               </a:rPr>
@@ -6945,7 +6993,7 @@
             <a:r>
               <a:rPr sz="1600" b="1">
                 <a:solidFill>
-                  <a:srgbClr val="1E5D95"/>
+                  <a:srgbClr val="C2410C"/>
                 </a:solidFill>
                 <a:latin typeface="Apple SD Gothic Neo"/>
               </a:rPr>
@@ -6957,11 +7005,11 @@
             <a:r>
               <a:rPr sz="1400" b="0">
                 <a:solidFill>
-                  <a:srgbClr val="16202B"/>
-                </a:solidFill>
-                <a:latin typeface="Apple SD Gothic Neo"/>
-              </a:rPr>
-              <a:t>“제도지(blueprint) 에디토리얼” — 도곽·치수선·인장 모티프</a:t>
+                  <a:srgbClr val="2B2016"/>
+                </a:solidFill>
+                <a:latin typeface="Apple SD Gothic Neo"/>
+              </a:rPr>
+              <a:t>“웜 제도지 + 주황 제도펜” 에디토리얼 — 도곽·치수선·인장 모티프</a:t>
             </a:r>
           </a:p>
           <a:p>
@@ -6969,11 +7017,11 @@
             <a:r>
               <a:rPr sz="1400" b="0">
                 <a:solidFill>
-                  <a:srgbClr val="16202B"/>
-                </a:solidFill>
-                <a:latin typeface="Apple SD Gothic Neo"/>
-              </a:rPr>
-              <a:t>검증기 통과 차트 팔레트 · 라이트/다크 완전 대응 · 반응형</a:t>
+                  <a:srgbClr val="2B2016"/>
+                </a:solidFill>
+                <a:latin typeface="Apple SD Gothic Neo"/>
+              </a:rPr>
+              <a:t>검증기 통과 팔레트 · 라이트/다크 · 모바일 390px 실측 검증</a:t>
             </a:r>
           </a:p>
         </p:txBody>
@@ -7004,7 +7052,7 @@
             <a:r>
               <a:rPr sz="1600" b="1">
                 <a:solidFill>
-                  <a:srgbClr val="C23B2E"/>
+                  <a:srgbClr val="1E5D95"/>
                 </a:solidFill>
                 <a:latin typeface="Apple SD Gothic Neo"/>
               </a:rPr>
@@ -7016,7 +7064,7 @@
             <a:r>
               <a:rPr sz="600" b="0">
                 <a:solidFill>
-                  <a:srgbClr val="16202B"/>
+                  <a:srgbClr val="2B2016"/>
                 </a:solidFill>
                 <a:latin typeface="Apple SD Gothic Neo"/>
               </a:rPr>
@@ -7028,7 +7076,7 @@
             <a:r>
               <a:rPr sz="1400" b="0">
                 <a:solidFill>
-                  <a:srgbClr val="16202B"/>
+                  <a:srgbClr val="2B2016"/>
                 </a:solidFill>
                 <a:latin typeface="Apple SD Gothic Neo"/>
               </a:rPr>
@@ -7040,7 +7088,7 @@
             <a:r>
               <a:rPr sz="1400" b="0">
                 <a:solidFill>
-                  <a:srgbClr val="16202B"/>
+                  <a:srgbClr val="2B2016"/>
                 </a:solidFill>
                 <a:latin typeface="Apple SD Gothic Neo"/>
               </a:rPr>
@@ -7052,7 +7100,7 @@
             <a:r>
               <a:rPr sz="1400" b="0">
                 <a:solidFill>
-                  <a:srgbClr val="16202B"/>
+                  <a:srgbClr val="2B2016"/>
                 </a:solidFill>
                 <a:latin typeface="Apple SD Gothic Neo"/>
               </a:rPr>
@@ -7064,11 +7112,11 @@
             <a:r>
               <a:rPr sz="1400" b="0">
                 <a:solidFill>
-                  <a:srgbClr val="16202B"/>
-                </a:solidFill>
-                <a:latin typeface="Apple SD Gothic Neo"/>
-              </a:rPr>
-              <a:t>엔지니어링 — 이중 구현 패리티, 파이프라인 멱등성</a:t>
+                  <a:srgbClr val="2B2016"/>
+                </a:solidFill>
+                <a:latin typeface="Apple SD Gothic Neo"/>
+              </a:rPr>
+              <a:t>엔지니어링 — 이중 구현 패리티, 파이프라인 멱등성·자동화</a:t>
             </a:r>
           </a:p>
           <a:p>
@@ -7076,11 +7124,11 @@
             <a:r>
               <a:rPr sz="1400" b="0">
                 <a:solidFill>
-                  <a:srgbClr val="16202B"/>
-                </a:solidFill>
-                <a:latin typeface="Apple SD Gothic Neo"/>
-              </a:rPr>
-              <a:t>프로덕트 — 기관 독자를 위한 서사·시각화·인터랙션 설계</a:t>
+                  <a:srgbClr val="2B2016"/>
+                </a:solidFill>
+                <a:latin typeface="Apple SD Gothic Neo"/>
+              </a:rPr>
+              <a:t>프로덕트 — 기관 독자를 위한 서사·시각화·접근성 설계</a:t>
             </a:r>
           </a:p>
           <a:p>
@@ -7088,7 +7136,7 @@
             <a:r>
               <a:rPr sz="1000" b="0">
                 <a:solidFill>
-                  <a:srgbClr val="16202B"/>
+                  <a:srgbClr val="2B2016"/>
                 </a:solidFill>
                 <a:latin typeface="Apple SD Gothic Neo"/>
               </a:rPr>
@@ -7098,13 +7146,13 @@
           <a:p>
             <a:pPr algn="l"/>
             <a:r>
-              <a:rPr sz="1300" b="1">
-                <a:solidFill>
-                  <a:srgbClr val="1E5D95"/>
-                </a:solidFill>
-                <a:latin typeface="Apple SD Gothic Neo"/>
-              </a:rPr>
-              <a:t>실행: ~/개발/serve.sh → http://localhost:8765</a:t>
+              <a:rPr sz="1350" b="1">
+                <a:solidFill>
+                  <a:srgbClr val="C2410C"/>
+                </a:solidFill>
+                <a:latin typeface="Apple SD Gothic Neo"/>
+              </a:rPr>
+              <a:t>공개: https://yoonjae.pages.dev — 매월 자동 갱신</a:t>
             </a:r>
           </a:p>
         </p:txBody>
